--- a/slides.pptx
+++ b/slides.pptx
@@ -5197,7 +5197,7 @@
               </a:defRPr>
             </a:pPr>
             <a:r>
-              <a:t>mode: agent</a:t>
+              <a:t>agent: agent</a:t>
             </a:r>
           </a:p>
           <a:p>
@@ -5518,7 +5518,7 @@
                         </a:defRPr>
                       </a:pPr>
                       <a:r>
-                        <a:t>mode</a:t>
+                        <a:t>agent</a:t>
                       </a:r>
                     </a:p>
                   </a:txBody>
@@ -5542,7 +5542,7 @@
                         </a:defRPr>
                       </a:pPr>
                       <a:r>
-                        <a:t>ask | edit | agent — which chat mode it runs in</a:t>
+                        <a:t>ask | agent | plan | &lt;custom-agent-name&gt;</a:t>
                       </a:r>
                     </a:p>
                   </a:txBody>
@@ -6203,7 +6203,7 @@
                         </a:defRPr>
                       </a:pPr>
                       <a:r>
-                        <a:t>Agent mode, prompt files, chat modes</a:t>
+                        <a:t>Agent mode, prompt files, custom agents</a:t>
                       </a:r>
                     </a:p>
                   </a:txBody>
@@ -6819,7 +6819,7 @@
               </a:defRPr>
             </a:pPr>
             <a:r>
-              <a:t>Exercise 6 — Custom Chat Modes</a:t>
+              <a:t>Exercise 6 — Custom Agents</a:t>
             </a:r>
           </a:p>
         </p:txBody>
@@ -6858,7 +6858,7 @@
               </a:defRPr>
             </a:pPr>
             <a:r>
-              <a:t>Persistent personas with scoped tools. Sit alongside Ask / Edit / Agent</a:t>
+              <a:t>Persistent personas with scoped tools. Sit alongside built-in Ask</a:t>
             </a:r>
           </a:p>
           <a:p>
@@ -6874,7 +6874,7 @@
               </a:defRPr>
             </a:pPr>
             <a:r>
-              <a:t>in the mode picker.</a:t>
+              <a:t>and Agent in the agent picker. Renamed from 'chat modes' in 2026.</a:t>
             </a:r>
           </a:p>
           <a:p>
@@ -6903,7 +6903,7 @@
               </a:defRPr>
             </a:pPr>
             <a:r>
-              <a:t>.github/chatmodes/&lt;name&gt;.chatmode.md</a:t>
+              <a:t>.github/agents/&lt;name&gt;.agent.md</a:t>
             </a:r>
           </a:p>
         </p:txBody>
@@ -6975,23 +6975,7 @@
               </a:defRPr>
             </a:pPr>
             <a:r>
-              <a:t>tools: ['codebase','search','usages','findTestFiles',</a:t>
-            </a:r>
-          </a:p>
-          <a:p>
-            <a:pPr>
-              <a:spcBef>
-                <a:spcPts val="200"/>
-              </a:spcBef>
-              <a:defRPr sz="1400">
-                <a:solidFill>
-                  <a:srgbClr val="E8C47C"/>
-                </a:solidFill>
-                <a:latin typeface="Consolas"/>
-              </a:defRPr>
-            </a:pPr>
-            <a:r>
-              <a:t>        'problems','changes','fetch']</a:t>
+              <a:t>tools: ['search/codebase', 'search/usages', 'web/fetch']</a:t>
             </a:r>
           </a:p>
           <a:p>
@@ -7114,7 +7098,7 @@
               </a:defRPr>
             </a:pPr>
             <a:r>
-              <a:t>Prompt Files vs Chat Modes</a:t>
+              <a:t>Prompt Files vs Custom Agents</a:t>
             </a:r>
           </a:p>
         </p:txBody>
@@ -7180,7 +7164,7 @@
                         </a:defRPr>
                       </a:pPr>
                       <a:r>
-                        <a:t>Chat mode</a:t>
+                        <a:t>Custom agent</a:t>
                       </a:r>
                     </a:p>
                   </a:txBody>
@@ -7330,7 +7314,7 @@
                         </a:defRPr>
                       </a:pPr>
                       <a:r>
-                        <a:t>Ships in mode picker</a:t>
+                        <a:t>Ships in agent picker</a:t>
                       </a:r>
                     </a:p>
                   </a:txBody>
@@ -7380,7 +7364,7 @@
                         </a:defRPr>
                       </a:pPr>
                       <a:r>
-                        <a:t>Invocation: switch mode, chat freely</a:t>
+                        <a:t>Invocation: switch agent, chat freely</a:t>
                       </a:r>
                     </a:p>
                   </a:txBody>
@@ -9714,7 +9698,7 @@
               </a:defRPr>
             </a:pPr>
             <a:r>
-              <a:t>  4. Build a planner / reviewer chat mode for your team</a:t>
+              <a:t>  4. Build a planner / reviewer custom agent for your team</a:t>
             </a:r>
           </a:p>
           <a:p>
@@ -10131,7 +10115,7 @@
                         </a:defRPr>
                       </a:pPr>
                       <a:r>
-                        <a:t>Chat modes</a:t>
+                        <a:t>Custom agents</a:t>
                       </a:r>
                     </a:p>
                   </a:txBody>
@@ -10155,7 +10139,7 @@
                         </a:defRPr>
                       </a:pPr>
                       <a:r>
-                        <a:t>.github/chatmodes/*.chatmode.md</a:t>
+                        <a:t>.github/agents/*.agent.md</a:t>
                       </a:r>
                     </a:p>
                   </a:txBody>
